--- a/dataset/guides_final/SYS/manual/IT-SYS-005-M_메신저·화상회의·협업 도구 처리 매뉴얼.pptx
+++ b/dataset/guides_final/SYS/manual/IT-SYS-005-M_메신저·화상회의·협업 도구 처리 매뉴얼.pptx
@@ -44179,7 +44179,7 @@
                 <a:ea typeface="Malgun Gothic"/>
                 <a:cs typeface="Malgun Gothic"/>
               </a:rPr>
-              <a:t>티켓: 담당자 조치가 필요한 건. 담당팀에 배정하고 상태를 RDY → IP → FIN → CLS 으로 관리한다.</a:t>
+              <a:t>티켓: 담당자 조치가 필요한 건. 담당팀에 배정하고 상태를 RDY → WIP → FIN → CLS 으로 관리한다.</a:t>
             </a:r>
           </a:p>
         </p:txBody>

--- a/dataset/guides_final/SYS/manual/IT-SYS-005-M_메신저·화상회의·협업 도구 처리 매뉴얼.pptx
+++ b/dataset/guides_final/SYS/manual/IT-SYS-005-M_메신저·화상회의·협업 도구 처리 매뉴얼.pptx
@@ -3240,7 +3240,7 @@
                 <a:ea typeface="Malgun Gothic"/>
                 <a:cs typeface="Malgun Gothic"/>
               </a:rPr>
-              <a:t>한화시스템 ICT IT 담당자 매뉴얼 · 사내 시스템</a:t>
+              <a:t>가상 ICT 기업 IT 담당자 매뉴얼 · 사내 시스템</a:t>
             </a:r>
           </a:p>
         </p:txBody>
@@ -3519,7 +3519,7 @@
                 <a:ea typeface="Malgun Gothic"/>
                 <a:cs typeface="Malgun Gothic"/>
               </a:rPr>
-              <a:t>© HANWHA SYSTEMS ICT · IT-SYS-005-M · 사내 제한</a:t>
+              <a:t>© 가상 ICT 기업 · IT-SYS-005-M · 사내 제한</a:t>
             </a:r>
           </a:p>
         </p:txBody>
@@ -5947,7 +5947,7 @@
                 <a:ea typeface="Malgun Gothic"/>
                 <a:cs typeface="Malgun Gothic"/>
               </a:rPr>
-              <a:t>© HANWHA SYSTEMS ICT · IT-SYS-005-M · 사내 제한</a:t>
+              <a:t>© 가상 ICT 기업 · IT-SYS-005-M · 사내 제한</a:t>
             </a:r>
           </a:p>
         </p:txBody>
@@ -8469,7 +8469,7 @@
                 <a:ea typeface="Malgun Gothic"/>
                 <a:cs typeface="Malgun Gothic"/>
               </a:rPr>
-              <a:t>© HANWHA SYSTEMS ICT · IT-SYS-005-M · 사내 제한</a:t>
+              <a:t>© 가상 ICT 기업 · IT-SYS-005-M · 사내 제한</a:t>
             </a:r>
           </a:p>
         </p:txBody>
@@ -10897,7 +10897,7 @@
                 <a:ea typeface="Malgun Gothic"/>
                 <a:cs typeface="Malgun Gothic"/>
               </a:rPr>
-              <a:t>© HANWHA SYSTEMS ICT · IT-SYS-005-M · 사내 제한</a:t>
+              <a:t>© 가상 ICT 기업 · IT-SYS-005-M · 사내 제한</a:t>
             </a:r>
           </a:p>
         </p:txBody>
@@ -13325,7 +13325,7 @@
                 <a:ea typeface="Malgun Gothic"/>
                 <a:cs typeface="Malgun Gothic"/>
               </a:rPr>
-              <a:t>© HANWHA SYSTEMS ICT · IT-SYS-005-M · 사내 제한</a:t>
+              <a:t>© 가상 ICT 기업 · IT-SYS-005-M · 사내 제한</a:t>
             </a:r>
           </a:p>
         </p:txBody>
@@ -15753,7 +15753,7 @@
                 <a:ea typeface="Malgun Gothic"/>
                 <a:cs typeface="Malgun Gothic"/>
               </a:rPr>
-              <a:t>© HANWHA SYSTEMS ICT · IT-SYS-005-M · 사내 제한</a:t>
+              <a:t>© 가상 ICT 기업 · IT-SYS-005-M · 사내 제한</a:t>
             </a:r>
           </a:p>
         </p:txBody>
@@ -18275,7 +18275,7 @@
                 <a:ea typeface="Malgun Gothic"/>
                 <a:cs typeface="Malgun Gothic"/>
               </a:rPr>
-              <a:t>© HANWHA SYSTEMS ICT · IT-SYS-005-M · 사내 제한</a:t>
+              <a:t>© 가상 ICT 기업 · IT-SYS-005-M · 사내 제한</a:t>
             </a:r>
           </a:p>
         </p:txBody>
@@ -20891,7 +20891,7 @@
                 <a:ea typeface="Malgun Gothic"/>
                 <a:cs typeface="Malgun Gothic"/>
               </a:rPr>
-              <a:t>© HANWHA SYSTEMS ICT · IT-SYS-005-M · 사내 제한</a:t>
+              <a:t>© 가상 ICT 기업 · IT-SYS-005-M · 사내 제한</a:t>
             </a:r>
           </a:p>
         </p:txBody>
@@ -23319,7 +23319,7 @@
                 <a:ea typeface="Malgun Gothic"/>
                 <a:cs typeface="Malgun Gothic"/>
               </a:rPr>
-              <a:t>© HANWHA SYSTEMS ICT · IT-SYS-005-M · 사내 제한</a:t>
+              <a:t>© 가상 ICT 기업 · IT-SYS-005-M · 사내 제한</a:t>
             </a:r>
           </a:p>
         </p:txBody>
@@ -25747,7 +25747,7 @@
                 <a:ea typeface="Malgun Gothic"/>
                 <a:cs typeface="Malgun Gothic"/>
               </a:rPr>
-              <a:t>© HANWHA SYSTEMS ICT · IT-SYS-005-M · 사내 제한</a:t>
+              <a:t>© 가상 ICT 기업 · IT-SYS-005-M · 사내 제한</a:t>
             </a:r>
           </a:p>
         </p:txBody>
@@ -28457,7 +28457,7 @@
                 <a:ea typeface="Malgun Gothic"/>
                 <a:cs typeface="Malgun Gothic"/>
               </a:rPr>
-              <a:t>© HANWHA SYSTEMS ICT · IT-SYS-005-M · 사내 제한</a:t>
+              <a:t>© 가상 ICT 기업 · IT-SYS-005-M · 사내 제한</a:t>
             </a:r>
           </a:p>
         </p:txBody>
@@ -30100,7 +30100,7 @@
                 <a:ea typeface="Malgun Gothic"/>
                 <a:cs typeface="Malgun Gothic"/>
               </a:rPr>
-              <a:t>© HANWHA SYSTEMS ICT · IT-SYS-005-M · 사내 제한</a:t>
+              <a:t>© 가상 ICT 기업 · IT-SYS-005-M · 사내 제한</a:t>
             </a:r>
           </a:p>
         </p:txBody>
@@ -32434,7 +32434,7 @@
                 <a:ea typeface="Malgun Gothic"/>
                 <a:cs typeface="Malgun Gothic"/>
               </a:rPr>
-              <a:t>© HANWHA SYSTEMS ICT · IT-SYS-005-M · 사내 제한</a:t>
+              <a:t>© 가상 ICT 기업 · IT-SYS-005-M · 사내 제한</a:t>
             </a:r>
           </a:p>
         </p:txBody>
@@ -32682,7 +32682,7 @@
                 <a:ea typeface="Malgun Gothic"/>
                 <a:cs typeface="Malgun Gothic"/>
               </a:rPr>
-              <a:t>© HANWHA SYSTEMS ICT · IT-SYS-005-M · 사내 제한</a:t>
+              <a:t>© 가상 ICT 기업 · IT-SYS-005-M · 사내 제한</a:t>
             </a:r>
           </a:p>
         </p:txBody>
@@ -33365,7 +33365,7 @@
                 <a:ea typeface="Malgun Gothic"/>
                 <a:cs typeface="Malgun Gothic"/>
               </a:rPr>
-              <a:t>© HANWHA SYSTEMS ICT · IT-SYS-005-M · 사내 제한</a:t>
+              <a:t>© 가상 ICT 기업 · IT-SYS-005-M · 사내 제한</a:t>
             </a:r>
           </a:p>
         </p:txBody>
@@ -33613,7 +33613,7 @@
                 <a:ea typeface="Malgun Gothic"/>
                 <a:cs typeface="Malgun Gothic"/>
               </a:rPr>
-              <a:t>© HANWHA SYSTEMS ICT · IT-SYS-005-M · 사내 제한</a:t>
+              <a:t>© 가상 ICT 기업 · IT-SYS-005-M · 사내 제한</a:t>
             </a:r>
           </a:p>
         </p:txBody>
@@ -34641,7 +34641,7 @@
                 <a:ea typeface="Malgun Gothic"/>
                 <a:cs typeface="Malgun Gothic"/>
               </a:rPr>
-              <a:t>© HANWHA SYSTEMS ICT · IT-SYS-005-M · 사내 제한</a:t>
+              <a:t>© 가상 ICT 기업 · IT-SYS-005-M · 사내 제한</a:t>
             </a:r>
           </a:p>
         </p:txBody>
@@ -34889,7 +34889,7 @@
                 <a:ea typeface="Malgun Gothic"/>
                 <a:cs typeface="Malgun Gothic"/>
               </a:rPr>
-              <a:t>© HANWHA SYSTEMS ICT · IT-SYS-005-M · 사내 제한</a:t>
+              <a:t>© 가상 ICT 기업 · IT-SYS-005-M · 사내 제한</a:t>
             </a:r>
           </a:p>
         </p:txBody>
@@ -35469,7 +35469,7 @@
                 <a:ea typeface="Malgun Gothic"/>
                 <a:cs typeface="Malgun Gothic"/>
               </a:rPr>
-              <a:t>© HANWHA SYSTEMS ICT · IT-SYS-005-M · 사내 제한</a:t>
+              <a:t>© 가상 ICT 기업 · IT-SYS-005-M · 사내 제한</a:t>
             </a:r>
           </a:p>
         </p:txBody>
@@ -36446,7 +36446,7 @@
                 <a:ea typeface="Malgun Gothic"/>
                 <a:cs typeface="Malgun Gothic"/>
               </a:rPr>
-              <a:t>© HANWHA SYSTEMS ICT · IT-SYS-005-M · 사내 제한</a:t>
+              <a:t>© 가상 ICT 기업 · IT-SYS-005-M · 사내 제한</a:t>
             </a:r>
           </a:p>
         </p:txBody>
@@ -37592,7 +37592,7 @@
                 <a:ea typeface="Malgun Gothic"/>
                 <a:cs typeface="Malgun Gothic"/>
               </a:rPr>
-              <a:t>© HANWHA SYSTEMS ICT · IT-SYS-005-M · 사내 제한</a:t>
+              <a:t>© 가상 ICT 기업 · IT-SYS-005-M · 사내 제한</a:t>
             </a:r>
           </a:p>
         </p:txBody>
@@ -37840,7 +37840,7 @@
                 <a:ea typeface="Malgun Gothic"/>
                 <a:cs typeface="Malgun Gothic"/>
               </a:rPr>
-              <a:t>© HANWHA SYSTEMS ICT · IT-SYS-005-M · 사내 제한</a:t>
+              <a:t>© 가상 ICT 기업 · IT-SYS-005-M · 사내 제한</a:t>
             </a:r>
           </a:p>
         </p:txBody>
@@ -38738,7 +38738,7 @@
                 <a:ea typeface="Malgun Gothic"/>
                 <a:cs typeface="Malgun Gothic"/>
               </a:rPr>
-              <a:t>© HANWHA SYSTEMS ICT · IT-SYS-005-M · 사내 제한</a:t>
+              <a:t>© 가상 ICT 기업 · IT-SYS-005-M · 사내 제한</a:t>
             </a:r>
           </a:p>
         </p:txBody>
@@ -38986,7 +38986,7 @@
                 <a:ea typeface="Malgun Gothic"/>
                 <a:cs typeface="Malgun Gothic"/>
               </a:rPr>
-              <a:t>© HANWHA SYSTEMS ICT · IT-SYS-005-M · 사내 제한</a:t>
+              <a:t>© 가상 ICT 기업 · IT-SYS-005-M · 사내 제한</a:t>
             </a:r>
           </a:p>
         </p:txBody>
@@ -44226,7 +44226,7 @@
                 <a:ea typeface="Malgun Gothic"/>
                 <a:cs typeface="Malgun Gothic"/>
               </a:rPr>
-              <a:t>© HANWHA SYSTEMS ICT · IT-SYS-005-M · 사내 제한</a:t>
+              <a:t>© 가상 ICT 기업 · IT-SYS-005-M · 사내 제한</a:t>
             </a:r>
           </a:p>
         </p:txBody>
@@ -44838,7 +44838,7 @@
                 <a:ea typeface="Malgun Gothic"/>
                 <a:cs typeface="Malgun Gothic"/>
               </a:rPr>
-              <a:t>© HANWHA SYSTEMS ICT · IT-SYS-005-M · 사내 제한</a:t>
+              <a:t>© 가상 ICT 기업 · IT-SYS-005-M · 사내 제한</a:t>
             </a:r>
           </a:p>
         </p:txBody>
@@ -45086,7 +45086,7 @@
                 <a:ea typeface="Malgun Gothic"/>
                 <a:cs typeface="Malgun Gothic"/>
               </a:rPr>
-              <a:t>© HANWHA SYSTEMS ICT · IT-SYS-005-M · 사내 제한</a:t>
+              <a:t>© 가상 ICT 기업 · IT-SYS-005-M · 사내 제한</a:t>
             </a:r>
           </a:p>
         </p:txBody>
